--- a/praesentation-final.pptx
+++ b/praesentation-final.pptx
@@ -31,7 +31,7 @@
     <p:sldId id="376" r:id="rId22"/>
     <p:sldId id="3933" r:id="rId23"/>
     <p:sldId id="377" r:id="rId24"/>
-    <p:sldId id="3936" r:id="rId25"/>
+    <p:sldId id="3937" r:id="rId25"/>
     <p:sldId id="378" r:id="rId26"/>
     <p:sldId id="3934" r:id="rId27"/>
     <p:sldId id="3935" r:id="rId28"/>
@@ -189,7 +189,11 @@
         <p14:section name="Reflexion" id="{4608F46A-AD80-4D2E-9443-0D33C7D46BB9}">
           <p14:sldIdLst>
             <p14:sldId id="377"/>
-            <p14:sldId id="3936"/>
+          </p14:sldIdLst>
+        </p14:section>
+        <p14:section name="Danksagung" id="{44166DF1-BF8C-4B0E-8E62-7F75BE5934CA}">
+          <p14:sldIdLst>
+            <p14:sldId id="3937"/>
           </p14:sldIdLst>
         </p14:section>
         <p14:section name="Quellen" id="{146C06E0-473A-4EC0-A026-5E7C0E771B05}">
@@ -9082,42 +9086,6 @@
           <a:chExt cx="0" cy="0"/>
         </a:xfrm>
       </p:grpSpPr>
-      <p:pic>
-        <p:nvPicPr>
-          <p:cNvPr id="14" name="Bildplatzhalter 8">
-            <a:extLst>
-              <a:ext uri="{FF2B5EF4-FFF2-40B4-BE49-F238E27FC236}">
-                <a16:creationId xmlns:a16="http://schemas.microsoft.com/office/drawing/2014/main" id="{2EF26B43-C881-2963-4816-FFB78C19D1DC}"/>
-              </a:ext>
-            </a:extLst>
-          </p:cNvPr>
-          <p:cNvPicPr>
-            <a:picLocks noGrp="1" noChangeAspect="1"/>
-          </p:cNvPicPr>
-          <p:nvPr>
-            <p:ph type="pic" sz="quarter" idx="14"/>
-          </p:nvPr>
-        </p:nvPicPr>
-        <p:blipFill>
-          <a:blip r:embed="rId2" cstate="print">
-            <a:extLst>
-              <a:ext uri="{28A0092B-C50C-407E-A947-70E740481C1C}">
-                <a14:useLocalDpi xmlns:a14="http://schemas.microsoft.com/office/drawing/2010/main"/>
-              </a:ext>
-            </a:extLst>
-          </a:blip>
-          <a:srcRect/>
-          <a:stretch>
-            <a:fillRect/>
-          </a:stretch>
-        </p:blipFill>
-        <p:spPr>
-          <a:xfrm>
-            <a:off x="0" y="765175"/>
-            <a:ext cx="5986463" cy="6092825"/>
-          </a:xfrm>
-        </p:spPr>
-      </p:pic>
       <p:sp>
         <p:nvSpPr>
           <p:cNvPr id="4" name="Titel 3">
@@ -9449,6 +9417,144 @@
           </a:p>
         </p:txBody>
       </p:sp>
+      <p:pic>
+        <p:nvPicPr>
+          <p:cNvPr id="9" name="Bildplatzhalter 8">
+            <a:extLst>
+              <a:ext uri="{FF2B5EF4-FFF2-40B4-BE49-F238E27FC236}">
+                <a16:creationId xmlns:a16="http://schemas.microsoft.com/office/drawing/2014/main" id="{FF99BECD-277A-39EF-7C44-5ED234904901}"/>
+              </a:ext>
+            </a:extLst>
+          </p:cNvPr>
+          <p:cNvPicPr>
+            <a:picLocks noGrp="1" noChangeAspect="1"/>
+          </p:cNvPicPr>
+          <p:nvPr>
+            <p:ph type="pic" sz="quarter" idx="14"/>
+          </p:nvPr>
+        </p:nvPicPr>
+        <p:blipFill>
+          <a:blip r:embed="rId2">
+            <a:extLst>
+              <a:ext uri="{28A0092B-C50C-407E-A947-70E740481C1C}">
+                <a14:useLocalDpi xmlns:a14="http://schemas.microsoft.com/office/drawing/2010/main" val="0"/>
+              </a:ext>
+            </a:extLst>
+          </a:blip>
+          <a:srcRect t="18" r="537" b="-60571"/>
+          <a:stretch>
+            <a:fillRect/>
+          </a:stretch>
+        </p:blipFill>
+        <p:spPr bwMode="gray">
+          <a:xfrm>
+            <a:off x="0" y="765175"/>
+            <a:ext cx="5988050" cy="5599113"/>
+          </a:xfrm>
+          <a:prstGeom prst="rect">
+            <a:avLst/>
+          </a:prstGeom>
+          <a:solidFill>
+            <a:srgbClr val="BBBCBD"/>
+          </a:solidFill>
+        </p:spPr>
+      </p:pic>
+      <p:pic>
+        <p:nvPicPr>
+          <p:cNvPr id="11" name="Grafik 10">
+            <a:extLst>
+              <a:ext uri="{FF2B5EF4-FFF2-40B4-BE49-F238E27FC236}">
+                <a16:creationId xmlns:a16="http://schemas.microsoft.com/office/drawing/2014/main" id="{2A1F20FA-0517-B9B4-B33C-7985FC84CB4B}"/>
+              </a:ext>
+            </a:extLst>
+          </p:cNvPr>
+          <p:cNvPicPr>
+            <a:picLocks noChangeAspect="1"/>
+          </p:cNvPicPr>
+          <p:nvPr/>
+        </p:nvPicPr>
+        <p:blipFill>
+          <a:blip r:embed="rId3">
+            <a:extLst>
+              <a:ext uri="{28A0092B-C50C-407E-A947-70E740481C1C}">
+                <a14:useLocalDpi xmlns:a14="http://schemas.microsoft.com/office/drawing/2010/main" val="0"/>
+              </a:ext>
+            </a:extLst>
+          </a:blip>
+          <a:stretch>
+            <a:fillRect/>
+          </a:stretch>
+        </p:blipFill>
+        <p:spPr>
+          <a:xfrm>
+            <a:off x="0" y="4495545"/>
+            <a:ext cx="4105075" cy="1868130"/>
+          </a:xfrm>
+          <a:prstGeom prst="rect">
+            <a:avLst/>
+          </a:prstGeom>
+        </p:spPr>
+      </p:pic>
+      <p:pic>
+        <p:nvPicPr>
+          <p:cNvPr id="13" name="Grafik 12">
+            <a:extLst>
+              <a:ext uri="{FF2B5EF4-FFF2-40B4-BE49-F238E27FC236}">
+                <a16:creationId xmlns:a16="http://schemas.microsoft.com/office/drawing/2014/main" id="{5EECBA4B-BBFB-C2AB-B778-FE8D100291D4}"/>
+              </a:ext>
+            </a:extLst>
+          </p:cNvPr>
+          <p:cNvPicPr>
+            <a:picLocks noChangeAspect="1"/>
+          </p:cNvPicPr>
+          <p:nvPr/>
+        </p:nvPicPr>
+        <p:blipFill>
+          <a:blip r:embed="rId4"/>
+          <a:stretch>
+            <a:fillRect/>
+          </a:stretch>
+        </p:blipFill>
+        <p:spPr>
+          <a:xfrm>
+            <a:off x="0" y="4236719"/>
+            <a:ext cx="6096000" cy="312421"/>
+          </a:xfrm>
+          <a:prstGeom prst="rect">
+            <a:avLst/>
+          </a:prstGeom>
+        </p:spPr>
+      </p:pic>
+      <p:pic>
+        <p:nvPicPr>
+          <p:cNvPr id="16" name="Grafik 15">
+            <a:extLst>
+              <a:ext uri="{FF2B5EF4-FFF2-40B4-BE49-F238E27FC236}">
+                <a16:creationId xmlns:a16="http://schemas.microsoft.com/office/drawing/2014/main" id="{99648FF7-B39F-E6D3-C4C7-A6ED055EEE6A}"/>
+              </a:ext>
+            </a:extLst>
+          </p:cNvPr>
+          <p:cNvPicPr>
+            <a:picLocks noChangeAspect="1"/>
+          </p:cNvPicPr>
+          <p:nvPr/>
+        </p:nvPicPr>
+        <p:blipFill>
+          <a:blip r:embed="rId5"/>
+          <a:stretch>
+            <a:fillRect/>
+          </a:stretch>
+        </p:blipFill>
+        <p:spPr>
+          <a:xfrm>
+            <a:off x="4105075" y="4334848"/>
+            <a:ext cx="2098875" cy="2028827"/>
+          </a:xfrm>
+          <a:prstGeom prst="rect">
+            <a:avLst/>
+          </a:prstGeom>
+        </p:spPr>
+      </p:pic>
     </p:spTree>
     <p:extLst>
       <p:ext uri="{BB962C8B-B14F-4D97-AF65-F5344CB8AC3E}">
@@ -9497,42 +9603,6 @@
           <a:chExt cx="0" cy="0"/>
         </a:xfrm>
       </p:grpSpPr>
-      <p:pic>
-        <p:nvPicPr>
-          <p:cNvPr id="14" name="Bildplatzhalter 8">
-            <a:extLst>
-              <a:ext uri="{FF2B5EF4-FFF2-40B4-BE49-F238E27FC236}">
-                <a16:creationId xmlns:a16="http://schemas.microsoft.com/office/drawing/2014/main" id="{FA793DF3-EF34-4F8D-30E4-5C60CBEE708B}"/>
-              </a:ext>
-            </a:extLst>
-          </p:cNvPr>
-          <p:cNvPicPr>
-            <a:picLocks noGrp="1" noChangeAspect="1"/>
-          </p:cNvPicPr>
-          <p:nvPr>
-            <p:ph type="pic" sz="quarter" idx="14"/>
-          </p:nvPr>
-        </p:nvPicPr>
-        <p:blipFill>
-          <a:blip r:embed="rId2" cstate="print">
-            <a:extLst>
-              <a:ext uri="{28A0092B-C50C-407E-A947-70E740481C1C}">
-                <a14:useLocalDpi xmlns:a14="http://schemas.microsoft.com/office/drawing/2010/main"/>
-              </a:ext>
-            </a:extLst>
-          </a:blip>
-          <a:srcRect/>
-          <a:stretch>
-            <a:fillRect/>
-          </a:stretch>
-        </p:blipFill>
-        <p:spPr>
-          <a:xfrm>
-            <a:off x="0" y="765175"/>
-            <a:ext cx="5986463" cy="6092825"/>
-          </a:xfrm>
-        </p:spPr>
-      </p:pic>
       <p:sp>
         <p:nvSpPr>
           <p:cNvPr id="4" name="Titel 3">
@@ -9839,6 +9909,174 @@
           </a:p>
         </p:txBody>
       </p:sp>
+      <p:pic>
+        <p:nvPicPr>
+          <p:cNvPr id="9" name="Bildplatzhalter 8">
+            <a:extLst>
+              <a:ext uri="{FF2B5EF4-FFF2-40B4-BE49-F238E27FC236}">
+                <a16:creationId xmlns:a16="http://schemas.microsoft.com/office/drawing/2014/main" id="{7478DC38-D3A9-EA77-A44C-5B3508D30B73}"/>
+              </a:ext>
+            </a:extLst>
+          </p:cNvPr>
+          <p:cNvPicPr>
+            <a:picLocks noGrp="1" noChangeAspect="1"/>
+          </p:cNvPicPr>
+          <p:nvPr>
+            <p:ph type="pic" sz="quarter" idx="14"/>
+          </p:nvPr>
+        </p:nvPicPr>
+        <p:blipFill>
+          <a:blip r:embed="rId2">
+            <a:extLst>
+              <a:ext uri="{28A0092B-C50C-407E-A947-70E740481C1C}">
+                <a14:useLocalDpi xmlns:a14="http://schemas.microsoft.com/office/drawing/2010/main" val="0"/>
+              </a:ext>
+            </a:extLst>
+          </a:blip>
+          <a:srcRect t="-44984" r="-20" b="-166348"/>
+          <a:stretch>
+            <a:fillRect/>
+          </a:stretch>
+        </p:blipFill>
+        <p:spPr bwMode="gray">
+          <a:xfrm>
+            <a:off x="0" y="765175"/>
+            <a:ext cx="5988050" cy="5599113"/>
+          </a:xfrm>
+          <a:prstGeom prst="rect">
+            <a:avLst/>
+          </a:prstGeom>
+          <a:solidFill>
+            <a:srgbClr val="BBBCBD"/>
+          </a:solidFill>
+        </p:spPr>
+      </p:pic>
+      <p:pic>
+        <p:nvPicPr>
+          <p:cNvPr id="11" name="Grafik 10">
+            <a:extLst>
+              <a:ext uri="{FF2B5EF4-FFF2-40B4-BE49-F238E27FC236}">
+                <a16:creationId xmlns:a16="http://schemas.microsoft.com/office/drawing/2014/main" id="{9DB3EA56-65FB-88BD-1C10-DB72F6BE0E64}"/>
+              </a:ext>
+            </a:extLst>
+          </p:cNvPr>
+          <p:cNvPicPr>
+            <a:picLocks noChangeAspect="1"/>
+          </p:cNvPicPr>
+          <p:nvPr/>
+        </p:nvPicPr>
+        <p:blipFill>
+          <a:blip r:embed="rId3">
+            <a:extLst>
+              <a:ext uri="{28A0092B-C50C-407E-A947-70E740481C1C}">
+                <a14:useLocalDpi xmlns:a14="http://schemas.microsoft.com/office/drawing/2010/main" val="0"/>
+              </a:ext>
+            </a:extLst>
+          </a:blip>
+          <a:stretch>
+            <a:fillRect/>
+          </a:stretch>
+        </p:blipFill>
+        <p:spPr>
+          <a:xfrm>
+            <a:off x="0" y="4073795"/>
+            <a:ext cx="5988050" cy="648097"/>
+          </a:xfrm>
+          <a:prstGeom prst="rect">
+            <a:avLst/>
+          </a:prstGeom>
+        </p:spPr>
+      </p:pic>
+      <p:pic>
+        <p:nvPicPr>
+          <p:cNvPr id="13" name="Grafik 12">
+            <a:extLst>
+              <a:ext uri="{FF2B5EF4-FFF2-40B4-BE49-F238E27FC236}">
+                <a16:creationId xmlns:a16="http://schemas.microsoft.com/office/drawing/2014/main" id="{26A6230A-486E-E5C6-E867-ADD9D41EAFED}"/>
+              </a:ext>
+            </a:extLst>
+          </p:cNvPr>
+          <p:cNvPicPr>
+            <a:picLocks noChangeAspect="1"/>
+          </p:cNvPicPr>
+          <p:nvPr/>
+        </p:nvPicPr>
+        <p:blipFill>
+          <a:blip r:embed="rId4"/>
+          <a:stretch>
+            <a:fillRect/>
+          </a:stretch>
+        </p:blipFill>
+        <p:spPr>
+          <a:xfrm>
+            <a:off x="-572" y="689805"/>
+            <a:ext cx="6096000" cy="884380"/>
+          </a:xfrm>
+          <a:prstGeom prst="rect">
+            <a:avLst/>
+          </a:prstGeom>
+        </p:spPr>
+      </p:pic>
+      <p:pic>
+        <p:nvPicPr>
+          <p:cNvPr id="16" name="Grafik 15">
+            <a:extLst>
+              <a:ext uri="{FF2B5EF4-FFF2-40B4-BE49-F238E27FC236}">
+                <a16:creationId xmlns:a16="http://schemas.microsoft.com/office/drawing/2014/main" id="{B7708573-0CE1-7497-5F19-5B0D2F7F6B03}"/>
+              </a:ext>
+            </a:extLst>
+          </p:cNvPr>
+          <p:cNvPicPr>
+            <a:picLocks noChangeAspect="1"/>
+          </p:cNvPicPr>
+          <p:nvPr/>
+        </p:nvPicPr>
+        <p:blipFill>
+          <a:blip r:embed="rId4"/>
+          <a:stretch>
+            <a:fillRect/>
+          </a:stretch>
+        </p:blipFill>
+        <p:spPr>
+          <a:xfrm>
+            <a:off x="-572" y="3314699"/>
+            <a:ext cx="6096000" cy="759095"/>
+          </a:xfrm>
+          <a:prstGeom prst="rect">
+            <a:avLst/>
+          </a:prstGeom>
+        </p:spPr>
+      </p:pic>
+      <p:pic>
+        <p:nvPicPr>
+          <p:cNvPr id="18" name="Grafik 17">
+            <a:extLst>
+              <a:ext uri="{FF2B5EF4-FFF2-40B4-BE49-F238E27FC236}">
+                <a16:creationId xmlns:a16="http://schemas.microsoft.com/office/drawing/2014/main" id="{6D674DB2-0747-56F3-8CA5-F7894E6DD0D7}"/>
+              </a:ext>
+            </a:extLst>
+          </p:cNvPr>
+          <p:cNvPicPr>
+            <a:picLocks noChangeAspect="1"/>
+          </p:cNvPicPr>
+          <p:nvPr/>
+        </p:nvPicPr>
+        <p:blipFill>
+          <a:blip r:embed="rId4"/>
+          <a:stretch>
+            <a:fillRect/>
+          </a:stretch>
+        </p:blipFill>
+        <p:spPr>
+          <a:xfrm>
+            <a:off x="-572" y="4676346"/>
+            <a:ext cx="6096000" cy="1763311"/>
+          </a:xfrm>
+          <a:prstGeom prst="rect">
+            <a:avLst/>
+          </a:prstGeom>
+        </p:spPr>
+      </p:pic>
     </p:spTree>
     <p:extLst>
       <p:ext uri="{BB962C8B-B14F-4D97-AF65-F5344CB8AC3E}">
@@ -10284,42 +10522,6 @@
           <a:chExt cx="0" cy="0"/>
         </a:xfrm>
       </p:grpSpPr>
-      <p:pic>
-        <p:nvPicPr>
-          <p:cNvPr id="14" name="Bildplatzhalter 8">
-            <a:extLst>
-              <a:ext uri="{FF2B5EF4-FFF2-40B4-BE49-F238E27FC236}">
-                <a16:creationId xmlns:a16="http://schemas.microsoft.com/office/drawing/2014/main" id="{F8843A35-781D-071B-44E1-EB63E22CA8A8}"/>
-              </a:ext>
-            </a:extLst>
-          </p:cNvPr>
-          <p:cNvPicPr>
-            <a:picLocks noGrp="1" noChangeAspect="1"/>
-          </p:cNvPicPr>
-          <p:nvPr>
-            <p:ph type="pic" sz="quarter" idx="14"/>
-          </p:nvPr>
-        </p:nvPicPr>
-        <p:blipFill>
-          <a:blip r:embed="rId2" cstate="print">
-            <a:extLst>
-              <a:ext uri="{28A0092B-C50C-407E-A947-70E740481C1C}">
-                <a14:useLocalDpi xmlns:a14="http://schemas.microsoft.com/office/drawing/2010/main"/>
-              </a:ext>
-            </a:extLst>
-          </a:blip>
-          <a:srcRect/>
-          <a:stretch>
-            <a:fillRect/>
-          </a:stretch>
-        </p:blipFill>
-        <p:spPr>
-          <a:xfrm>
-            <a:off x="0" y="765175"/>
-            <a:ext cx="5986463" cy="6092825"/>
-          </a:xfrm>
-        </p:spPr>
-      </p:pic>
       <p:sp>
         <p:nvSpPr>
           <p:cNvPr id="4" name="Titel 3">
@@ -10628,6 +10830,108 @@
           </a:p>
         </p:txBody>
       </p:sp>
+      <p:pic>
+        <p:nvPicPr>
+          <p:cNvPr id="9" name="Bildplatzhalter 8">
+            <a:extLst>
+              <a:ext uri="{FF2B5EF4-FFF2-40B4-BE49-F238E27FC236}">
+                <a16:creationId xmlns:a16="http://schemas.microsoft.com/office/drawing/2014/main" id="{CD72BA4F-692C-B889-1ECC-3EAAD63B5C01}"/>
+              </a:ext>
+            </a:extLst>
+          </p:cNvPr>
+          <p:cNvPicPr>
+            <a:picLocks noGrp="1" noChangeAspect="1"/>
+          </p:cNvPicPr>
+          <p:nvPr>
+            <p:ph type="pic" sz="quarter" idx="14"/>
+          </p:nvPr>
+        </p:nvPicPr>
+        <p:blipFill>
+          <a:blip r:embed="rId2">
+            <a:extLst>
+              <a:ext uri="{28A0092B-C50C-407E-A947-70E740481C1C}">
+                <a14:useLocalDpi xmlns:a14="http://schemas.microsoft.com/office/drawing/2010/main" val="0"/>
+              </a:ext>
+            </a:extLst>
+          </a:blip>
+          <a:srcRect t="-33111" r="-20" b="-96047"/>
+          <a:stretch>
+            <a:fillRect/>
+          </a:stretch>
+        </p:blipFill>
+        <p:spPr bwMode="gray">
+          <a:xfrm>
+            <a:off x="0" y="765175"/>
+            <a:ext cx="5988050" cy="5599113"/>
+          </a:xfrm>
+          <a:prstGeom prst="rect">
+            <a:avLst/>
+          </a:prstGeom>
+          <a:solidFill>
+            <a:srgbClr val="BBBCBD"/>
+          </a:solidFill>
+        </p:spPr>
+      </p:pic>
+      <p:pic>
+        <p:nvPicPr>
+          <p:cNvPr id="11" name="Grafik 10">
+            <a:extLst>
+              <a:ext uri="{FF2B5EF4-FFF2-40B4-BE49-F238E27FC236}">
+                <a16:creationId xmlns:a16="http://schemas.microsoft.com/office/drawing/2014/main" id="{3018D8BF-6ECA-C393-E984-DAFA64E30074}"/>
+              </a:ext>
+            </a:extLst>
+          </p:cNvPr>
+          <p:cNvPicPr>
+            <a:picLocks noChangeAspect="1"/>
+          </p:cNvPicPr>
+          <p:nvPr/>
+        </p:nvPicPr>
+        <p:blipFill>
+          <a:blip r:embed="rId3"/>
+          <a:stretch>
+            <a:fillRect/>
+          </a:stretch>
+        </p:blipFill>
+        <p:spPr>
+          <a:xfrm>
+            <a:off x="0" y="3968930"/>
+            <a:ext cx="6096000" cy="2394745"/>
+          </a:xfrm>
+          <a:prstGeom prst="rect">
+            <a:avLst/>
+          </a:prstGeom>
+        </p:spPr>
+      </p:pic>
+      <p:pic>
+        <p:nvPicPr>
+          <p:cNvPr id="13" name="Grafik 12">
+            <a:extLst>
+              <a:ext uri="{FF2B5EF4-FFF2-40B4-BE49-F238E27FC236}">
+                <a16:creationId xmlns:a16="http://schemas.microsoft.com/office/drawing/2014/main" id="{DAD4BDAA-068B-CCE8-778A-E57124C4C5D2}"/>
+              </a:ext>
+            </a:extLst>
+          </p:cNvPr>
+          <p:cNvPicPr>
+            <a:picLocks noChangeAspect="1"/>
+          </p:cNvPicPr>
+          <p:nvPr/>
+        </p:nvPicPr>
+        <p:blipFill>
+          <a:blip r:embed="rId4"/>
+          <a:stretch>
+            <a:fillRect/>
+          </a:stretch>
+        </p:blipFill>
+        <p:spPr>
+          <a:xfrm>
+            <a:off x="0" y="765175"/>
+            <a:ext cx="6096000" cy="911225"/>
+          </a:xfrm>
+          <a:prstGeom prst="rect">
+            <a:avLst/>
+          </a:prstGeom>
+        </p:spPr>
+      </p:pic>
     </p:spTree>
     <p:extLst>
       <p:ext uri="{BB962C8B-B14F-4D97-AF65-F5344CB8AC3E}">
@@ -10676,42 +10980,6 @@
           <a:chExt cx="0" cy="0"/>
         </a:xfrm>
       </p:grpSpPr>
-      <p:pic>
-        <p:nvPicPr>
-          <p:cNvPr id="14" name="Bildplatzhalter 8">
-            <a:extLst>
-              <a:ext uri="{FF2B5EF4-FFF2-40B4-BE49-F238E27FC236}">
-                <a16:creationId xmlns:a16="http://schemas.microsoft.com/office/drawing/2014/main" id="{A2F6970F-35B4-5C16-AE8E-0D56B4392939}"/>
-              </a:ext>
-            </a:extLst>
-          </p:cNvPr>
-          <p:cNvPicPr>
-            <a:picLocks noGrp="1" noChangeAspect="1"/>
-          </p:cNvPicPr>
-          <p:nvPr>
-            <p:ph type="pic" sz="quarter" idx="14"/>
-          </p:nvPr>
-        </p:nvPicPr>
-        <p:blipFill>
-          <a:blip r:embed="rId2" cstate="print">
-            <a:extLst>
-              <a:ext uri="{28A0092B-C50C-407E-A947-70E740481C1C}">
-                <a14:useLocalDpi xmlns:a14="http://schemas.microsoft.com/office/drawing/2010/main"/>
-              </a:ext>
-            </a:extLst>
-          </a:blip>
-          <a:srcRect/>
-          <a:stretch>
-            <a:fillRect/>
-          </a:stretch>
-        </p:blipFill>
-        <p:spPr>
-          <a:xfrm>
-            <a:off x="0" y="765175"/>
-            <a:ext cx="5986463" cy="6092825"/>
-          </a:xfrm>
-        </p:spPr>
-      </p:pic>
       <p:sp>
         <p:nvSpPr>
           <p:cNvPr id="4" name="Titel 3">
@@ -11021,6 +11289,108 @@
           </a:p>
         </p:txBody>
       </p:sp>
+      <p:pic>
+        <p:nvPicPr>
+          <p:cNvPr id="9" name="Bildplatzhalter 8">
+            <a:extLst>
+              <a:ext uri="{FF2B5EF4-FFF2-40B4-BE49-F238E27FC236}">
+                <a16:creationId xmlns:a16="http://schemas.microsoft.com/office/drawing/2014/main" id="{00A290AE-8FBD-98BB-A174-B5E74B296331}"/>
+              </a:ext>
+            </a:extLst>
+          </p:cNvPr>
+          <p:cNvPicPr>
+            <a:picLocks noGrp="1" noChangeAspect="1"/>
+          </p:cNvPicPr>
+          <p:nvPr>
+            <p:ph type="pic" sz="quarter" idx="14"/>
+          </p:nvPr>
+        </p:nvPicPr>
+        <p:blipFill>
+          <a:blip r:embed="rId2">
+            <a:extLst>
+              <a:ext uri="{28A0092B-C50C-407E-A947-70E740481C1C}">
+                <a14:useLocalDpi xmlns:a14="http://schemas.microsoft.com/office/drawing/2010/main" val="0"/>
+              </a:ext>
+            </a:extLst>
+          </a:blip>
+          <a:srcRect l="2" t="-30742" r="-21" b="-82028"/>
+          <a:stretch>
+            <a:fillRect/>
+          </a:stretch>
+        </p:blipFill>
+        <p:spPr bwMode="gray">
+          <a:xfrm>
+            <a:off x="0" y="765175"/>
+            <a:ext cx="5988050" cy="5599113"/>
+          </a:xfrm>
+          <a:prstGeom prst="rect">
+            <a:avLst/>
+          </a:prstGeom>
+          <a:solidFill>
+            <a:srgbClr val="BBBCBD"/>
+          </a:solidFill>
+        </p:spPr>
+      </p:pic>
+      <p:pic>
+        <p:nvPicPr>
+          <p:cNvPr id="11" name="Grafik 10">
+            <a:extLst>
+              <a:ext uri="{FF2B5EF4-FFF2-40B4-BE49-F238E27FC236}">
+                <a16:creationId xmlns:a16="http://schemas.microsoft.com/office/drawing/2014/main" id="{8664EB88-5FEF-8B08-DFDC-F6CEA5D1AD2E}"/>
+              </a:ext>
+            </a:extLst>
+          </p:cNvPr>
+          <p:cNvPicPr>
+            <a:picLocks noChangeAspect="1"/>
+          </p:cNvPicPr>
+          <p:nvPr/>
+        </p:nvPicPr>
+        <p:blipFill>
+          <a:blip r:embed="rId3"/>
+          <a:stretch>
+            <a:fillRect/>
+          </a:stretch>
+        </p:blipFill>
+        <p:spPr>
+          <a:xfrm>
+            <a:off x="0" y="4161719"/>
+            <a:ext cx="7020560" cy="2279721"/>
+          </a:xfrm>
+          <a:prstGeom prst="rect">
+            <a:avLst/>
+          </a:prstGeom>
+        </p:spPr>
+      </p:pic>
+      <p:pic>
+        <p:nvPicPr>
+          <p:cNvPr id="13" name="Grafik 12">
+            <a:extLst>
+              <a:ext uri="{FF2B5EF4-FFF2-40B4-BE49-F238E27FC236}">
+                <a16:creationId xmlns:a16="http://schemas.microsoft.com/office/drawing/2014/main" id="{13D6AE8A-E22F-C76C-C241-E70DE5626888}"/>
+              </a:ext>
+            </a:extLst>
+          </p:cNvPr>
+          <p:cNvPicPr>
+            <a:picLocks noChangeAspect="1"/>
+          </p:cNvPicPr>
+          <p:nvPr/>
+        </p:nvPicPr>
+        <p:blipFill>
+          <a:blip r:embed="rId4"/>
+          <a:stretch>
+            <a:fillRect/>
+          </a:stretch>
+        </p:blipFill>
+        <p:spPr>
+          <a:xfrm>
+            <a:off x="0" y="765175"/>
+            <a:ext cx="6096000" cy="868553"/>
+          </a:xfrm>
+          <a:prstGeom prst="rect">
+            <a:avLst/>
+          </a:prstGeom>
+        </p:spPr>
+      </p:pic>
     </p:spTree>
     <p:extLst>
       <p:ext uri="{BB962C8B-B14F-4D97-AF65-F5344CB8AC3E}">
@@ -11069,42 +11439,6 @@
           <a:chExt cx="0" cy="0"/>
         </a:xfrm>
       </p:grpSpPr>
-      <p:pic>
-        <p:nvPicPr>
-          <p:cNvPr id="14" name="Bildplatzhalter 8">
-            <a:extLst>
-              <a:ext uri="{FF2B5EF4-FFF2-40B4-BE49-F238E27FC236}">
-                <a16:creationId xmlns:a16="http://schemas.microsoft.com/office/drawing/2014/main" id="{7F1C53AC-1289-0A2A-F43D-6249F0CB6646}"/>
-              </a:ext>
-            </a:extLst>
-          </p:cNvPr>
-          <p:cNvPicPr>
-            <a:picLocks noGrp="1" noChangeAspect="1"/>
-          </p:cNvPicPr>
-          <p:nvPr>
-            <p:ph type="pic" sz="quarter" idx="14"/>
-          </p:nvPr>
-        </p:nvPicPr>
-        <p:blipFill>
-          <a:blip r:embed="rId2" cstate="print">
-            <a:extLst>
-              <a:ext uri="{28A0092B-C50C-407E-A947-70E740481C1C}">
-                <a14:useLocalDpi xmlns:a14="http://schemas.microsoft.com/office/drawing/2010/main"/>
-              </a:ext>
-            </a:extLst>
-          </a:blip>
-          <a:srcRect/>
-          <a:stretch>
-            <a:fillRect/>
-          </a:stretch>
-        </p:blipFill>
-        <p:spPr>
-          <a:xfrm>
-            <a:off x="0" y="765175"/>
-            <a:ext cx="5986463" cy="6092825"/>
-          </a:xfrm>
-        </p:spPr>
-      </p:pic>
       <p:sp>
         <p:nvSpPr>
           <p:cNvPr id="4" name="Titel 3">
@@ -11452,6 +11786,108 @@
           </a:p>
         </p:txBody>
       </p:sp>
+      <p:pic>
+        <p:nvPicPr>
+          <p:cNvPr id="11" name="Bildplatzhalter 10">
+            <a:extLst>
+              <a:ext uri="{FF2B5EF4-FFF2-40B4-BE49-F238E27FC236}">
+                <a16:creationId xmlns:a16="http://schemas.microsoft.com/office/drawing/2014/main" id="{968AA636-DAFA-45A8-C759-C14912F8D610}"/>
+              </a:ext>
+            </a:extLst>
+          </p:cNvPr>
+          <p:cNvPicPr>
+            <a:picLocks noGrp="1" noChangeAspect="1"/>
+          </p:cNvPicPr>
+          <p:nvPr>
+            <p:ph type="pic" sz="quarter" idx="14"/>
+          </p:nvPr>
+        </p:nvPicPr>
+        <p:blipFill>
+          <a:blip r:embed="rId2">
+            <a:extLst>
+              <a:ext uri="{28A0092B-C50C-407E-A947-70E740481C1C}">
+                <a14:useLocalDpi xmlns:a14="http://schemas.microsoft.com/office/drawing/2010/main" val="0"/>
+              </a:ext>
+            </a:extLst>
+          </a:blip>
+          <a:srcRect t="-32043" r="-20" b="-89731"/>
+          <a:stretch>
+            <a:fillRect/>
+          </a:stretch>
+        </p:blipFill>
+        <p:spPr bwMode="gray">
+          <a:xfrm>
+            <a:off x="0" y="765175"/>
+            <a:ext cx="5988050" cy="5599113"/>
+          </a:xfrm>
+          <a:prstGeom prst="rect">
+            <a:avLst/>
+          </a:prstGeom>
+          <a:solidFill>
+            <a:srgbClr val="BBBCBD"/>
+          </a:solidFill>
+        </p:spPr>
+      </p:pic>
+      <p:pic>
+        <p:nvPicPr>
+          <p:cNvPr id="13" name="Grafik 12">
+            <a:extLst>
+              <a:ext uri="{FF2B5EF4-FFF2-40B4-BE49-F238E27FC236}">
+                <a16:creationId xmlns:a16="http://schemas.microsoft.com/office/drawing/2014/main" id="{502C0D6A-9C48-505B-6C52-F31A63A1B2AD}"/>
+              </a:ext>
+            </a:extLst>
+          </p:cNvPr>
+          <p:cNvPicPr>
+            <a:picLocks noChangeAspect="1"/>
+          </p:cNvPicPr>
+          <p:nvPr/>
+        </p:nvPicPr>
+        <p:blipFill>
+          <a:blip r:embed="rId3"/>
+          <a:stretch>
+            <a:fillRect/>
+          </a:stretch>
+        </p:blipFill>
+        <p:spPr>
+          <a:xfrm>
+            <a:off x="0" y="4083954"/>
+            <a:ext cx="6096000" cy="2279721"/>
+          </a:xfrm>
+          <a:prstGeom prst="rect">
+            <a:avLst/>
+          </a:prstGeom>
+        </p:spPr>
+      </p:pic>
+      <p:pic>
+        <p:nvPicPr>
+          <p:cNvPr id="16" name="Grafik 15">
+            <a:extLst>
+              <a:ext uri="{FF2B5EF4-FFF2-40B4-BE49-F238E27FC236}">
+                <a16:creationId xmlns:a16="http://schemas.microsoft.com/office/drawing/2014/main" id="{F800BBEB-359A-F7C1-293C-DF8DE53D7A84}"/>
+              </a:ext>
+            </a:extLst>
+          </p:cNvPr>
+          <p:cNvPicPr>
+            <a:picLocks noChangeAspect="1"/>
+          </p:cNvPicPr>
+          <p:nvPr/>
+        </p:nvPicPr>
+        <p:blipFill>
+          <a:blip r:embed="rId4"/>
+          <a:stretch>
+            <a:fillRect/>
+          </a:stretch>
+        </p:blipFill>
+        <p:spPr>
+          <a:xfrm>
+            <a:off x="0" y="765175"/>
+            <a:ext cx="6096000" cy="868553"/>
+          </a:xfrm>
+          <a:prstGeom prst="rect">
+            <a:avLst/>
+          </a:prstGeom>
+        </p:spPr>
+      </p:pic>
     </p:spTree>
     <p:extLst>
       <p:ext uri="{BB962C8B-B14F-4D97-AF65-F5344CB8AC3E}">
@@ -11500,42 +11936,6 @@
           <a:chExt cx="0" cy="0"/>
         </a:xfrm>
       </p:grpSpPr>
-      <p:pic>
-        <p:nvPicPr>
-          <p:cNvPr id="14" name="Bildplatzhalter 8">
-            <a:extLst>
-              <a:ext uri="{FF2B5EF4-FFF2-40B4-BE49-F238E27FC236}">
-                <a16:creationId xmlns:a16="http://schemas.microsoft.com/office/drawing/2014/main" id="{2705202D-0F0D-D75F-93B4-A9A74F8B096E}"/>
-              </a:ext>
-            </a:extLst>
-          </p:cNvPr>
-          <p:cNvPicPr>
-            <a:picLocks noGrp="1" noChangeAspect="1"/>
-          </p:cNvPicPr>
-          <p:nvPr>
-            <p:ph type="pic" sz="quarter" idx="14"/>
-          </p:nvPr>
-        </p:nvPicPr>
-        <p:blipFill>
-          <a:blip r:embed="rId2" cstate="print">
-            <a:extLst>
-              <a:ext uri="{28A0092B-C50C-407E-A947-70E740481C1C}">
-                <a14:useLocalDpi xmlns:a14="http://schemas.microsoft.com/office/drawing/2010/main"/>
-              </a:ext>
-            </a:extLst>
-          </a:blip>
-          <a:srcRect/>
-          <a:stretch>
-            <a:fillRect/>
-          </a:stretch>
-        </p:blipFill>
-        <p:spPr>
-          <a:xfrm>
-            <a:off x="0" y="765175"/>
-            <a:ext cx="5986463" cy="6092825"/>
-          </a:xfrm>
-        </p:spPr>
-      </p:pic>
       <p:sp>
         <p:nvSpPr>
           <p:cNvPr id="4" name="Titel 3">
@@ -11880,6 +12280,108 @@
           </a:p>
         </p:txBody>
       </p:sp>
+      <p:pic>
+        <p:nvPicPr>
+          <p:cNvPr id="13" name="Bildplatzhalter 12">
+            <a:extLst>
+              <a:ext uri="{FF2B5EF4-FFF2-40B4-BE49-F238E27FC236}">
+                <a16:creationId xmlns:a16="http://schemas.microsoft.com/office/drawing/2014/main" id="{349F4680-3939-480D-8865-407976F4731A}"/>
+              </a:ext>
+            </a:extLst>
+          </p:cNvPr>
+          <p:cNvPicPr>
+            <a:picLocks noGrp="1" noChangeAspect="1"/>
+          </p:cNvPicPr>
+          <p:nvPr>
+            <p:ph type="pic" sz="quarter" idx="14"/>
+          </p:nvPr>
+        </p:nvPicPr>
+        <p:blipFill>
+          <a:blip r:embed="rId2">
+            <a:extLst>
+              <a:ext uri="{28A0092B-C50C-407E-A947-70E740481C1C}">
+                <a14:useLocalDpi xmlns:a14="http://schemas.microsoft.com/office/drawing/2010/main" val="0"/>
+              </a:ext>
+            </a:extLst>
+          </a:blip>
+          <a:srcRect l="2" t="-31748" r="-21" b="-87975"/>
+          <a:stretch>
+            <a:fillRect/>
+          </a:stretch>
+        </p:blipFill>
+        <p:spPr bwMode="gray">
+          <a:xfrm>
+            <a:off x="0" y="765175"/>
+            <a:ext cx="5988050" cy="5599113"/>
+          </a:xfrm>
+          <a:prstGeom prst="rect">
+            <a:avLst/>
+          </a:prstGeom>
+          <a:solidFill>
+            <a:srgbClr val="BBBCBD"/>
+          </a:solidFill>
+        </p:spPr>
+      </p:pic>
+      <p:pic>
+        <p:nvPicPr>
+          <p:cNvPr id="16" name="Grafik 15">
+            <a:extLst>
+              <a:ext uri="{FF2B5EF4-FFF2-40B4-BE49-F238E27FC236}">
+                <a16:creationId xmlns:a16="http://schemas.microsoft.com/office/drawing/2014/main" id="{0D1BF743-EE0F-13BC-5BA0-C8EB9A04D79E}"/>
+              </a:ext>
+            </a:extLst>
+          </p:cNvPr>
+          <p:cNvPicPr>
+            <a:picLocks noChangeAspect="1"/>
+          </p:cNvPicPr>
+          <p:nvPr/>
+        </p:nvPicPr>
+        <p:blipFill>
+          <a:blip r:embed="rId3"/>
+          <a:stretch>
+            <a:fillRect/>
+          </a:stretch>
+        </p:blipFill>
+        <p:spPr>
+          <a:xfrm>
+            <a:off x="0" y="4083954"/>
+            <a:ext cx="7020560" cy="2279721"/>
+          </a:xfrm>
+          <a:prstGeom prst="rect">
+            <a:avLst/>
+          </a:prstGeom>
+        </p:spPr>
+      </p:pic>
+      <p:pic>
+        <p:nvPicPr>
+          <p:cNvPr id="18" name="Grafik 17">
+            <a:extLst>
+              <a:ext uri="{FF2B5EF4-FFF2-40B4-BE49-F238E27FC236}">
+                <a16:creationId xmlns:a16="http://schemas.microsoft.com/office/drawing/2014/main" id="{9CEBECCB-59F3-1B92-9675-0D2E5D3E9A88}"/>
+              </a:ext>
+            </a:extLst>
+          </p:cNvPr>
+          <p:cNvPicPr>
+            <a:picLocks noChangeAspect="1"/>
+          </p:cNvPicPr>
+          <p:nvPr/>
+        </p:nvPicPr>
+        <p:blipFill>
+          <a:blip r:embed="rId4"/>
+          <a:stretch>
+            <a:fillRect/>
+          </a:stretch>
+        </p:blipFill>
+        <p:spPr>
+          <a:xfrm>
+            <a:off x="0" y="765175"/>
+            <a:ext cx="6096000" cy="862457"/>
+          </a:xfrm>
+          <a:prstGeom prst="rect">
+            <a:avLst/>
+          </a:prstGeom>
+        </p:spPr>
+      </p:pic>
     </p:spTree>
     <p:extLst>
       <p:ext uri="{BB962C8B-B14F-4D97-AF65-F5344CB8AC3E}">
@@ -16636,7 +17138,13 @@
   <p:cSld>
     <p:spTree>
       <p:nvGrpSpPr>
-        <p:cNvPr id="1" name=""/>
+        <p:cNvPr id="1" name="">
+          <a:extLst>
+            <a:ext uri="{FF2B5EF4-FFF2-40B4-BE49-F238E27FC236}">
+              <a16:creationId xmlns:a16="http://schemas.microsoft.com/office/drawing/2014/main" id="{2DC10130-FF7B-D8FE-68BB-5FA01F8CCC63}"/>
+            </a:ext>
+          </a:extLst>
+        </p:cNvPr>
         <p:cNvGrpSpPr/>
         <p:nvPr/>
       </p:nvGrpSpPr>
@@ -16648,12 +17156,41 @@
           <a:chExt cx="0" cy="0"/>
         </a:xfrm>
       </p:grpSpPr>
+      <p:pic>
+        <p:nvPicPr>
+          <p:cNvPr id="6" name="Bildplatzhalter 10">
+            <a:extLst>
+              <a:ext uri="{FF2B5EF4-FFF2-40B4-BE49-F238E27FC236}">
+                <a16:creationId xmlns:a16="http://schemas.microsoft.com/office/drawing/2014/main" id="{D25978BD-897A-D42C-0563-231E141A4C11}"/>
+              </a:ext>
+            </a:extLst>
+          </p:cNvPr>
+          <p:cNvPicPr>
+            <a:picLocks noGrp="1" noChangeAspect="1"/>
+          </p:cNvPicPr>
+          <p:nvPr>
+            <p:ph type="pic" sz="quarter" idx="13"/>
+          </p:nvPr>
+        </p:nvPicPr>
+        <p:blipFill rotWithShape="1">
+          <a:blip r:embed="rId2" cstate="print">
+            <a:extLst>
+              <a:ext uri="{28A0092B-C50C-407E-A947-70E740481C1C}">
+                <a14:useLocalDpi xmlns:a14="http://schemas.microsoft.com/office/drawing/2010/main"/>
+              </a:ext>
+            </a:extLst>
+          </a:blip>
+          <a:srcRect t="20" b="20"/>
+          <a:stretch/>
+        </p:blipFill>
+        <p:spPr/>
+      </p:pic>
       <p:sp>
         <p:nvSpPr>
-          <p:cNvPr id="2" name="Fußzeilenplatzhalter 1">
-            <a:extLst>
-              <a:ext uri="{FF2B5EF4-FFF2-40B4-BE49-F238E27FC236}">
-                <a16:creationId xmlns:a16="http://schemas.microsoft.com/office/drawing/2014/main" id="{5E99B920-6723-AABA-6C16-915B2EAAA8FC}"/>
+          <p:cNvPr id="2" name="Title 1">
+            <a:extLst>
+              <a:ext uri="{FF2B5EF4-FFF2-40B4-BE49-F238E27FC236}">
+                <a16:creationId xmlns:a16="http://schemas.microsoft.com/office/drawing/2014/main" id="{B93F6FBC-717B-A28D-E636-B551C2932230}"/>
               </a:ext>
             </a:extLst>
           </p:cNvPr>
@@ -16661,24 +17198,44 @@
             <a:spLocks noGrp="1"/>
           </p:cNvSpPr>
           <p:nvPr>
-            <p:ph type="ftr" sz="quarter" idx="11"/>
+            <p:ph type="ctrTitle"/>
           </p:nvPr>
         </p:nvSpPr>
-        <p:spPr/>
+        <p:spPr>
+          <a:xfrm>
+            <a:off x="334963" y="4584303"/>
+            <a:ext cx="5953103" cy="1113327"/>
+          </a:xfrm>
+        </p:spPr>
         <p:txBody>
           <a:bodyPr/>
           <a:lstStyle/>
           <a:p>
-            <a:endParaRPr lang="de-DE" dirty="0"/>
+            <a:r>
+              <a:rPr lang="de-DE" sz="2200" dirty="0">
+                <a:solidFill>
+                  <a:srgbClr val="007EB9"/>
+                </a:solidFill>
+              </a:rPr>
+              <a:t>VIELEN DANK!</a:t>
+            </a:r>
+            <a:br>
+              <a:rPr lang="de-DE" sz="2200" dirty="0">
+                <a:solidFill>
+                  <a:srgbClr val="007EB9"/>
+                </a:solidFill>
+              </a:rPr>
+            </a:br>
+            <a:endParaRPr lang="de-DE" sz="2200" dirty="0"/>
           </a:p>
         </p:txBody>
       </p:sp>
       <p:sp>
         <p:nvSpPr>
-          <p:cNvPr id="3" name="Foliennummernplatzhalter 2">
-            <a:extLst>
-              <a:ext uri="{FF2B5EF4-FFF2-40B4-BE49-F238E27FC236}">
-                <a16:creationId xmlns:a16="http://schemas.microsoft.com/office/drawing/2014/main" id="{3A9B8622-5F69-6F8E-69B6-AB59DF6FC5A0}"/>
+          <p:cNvPr id="7" name="Subtitle 6">
+            <a:extLst>
+              <a:ext uri="{FF2B5EF4-FFF2-40B4-BE49-F238E27FC236}">
+                <a16:creationId xmlns:a16="http://schemas.microsoft.com/office/drawing/2014/main" id="{895EF532-39FC-976E-6C27-9C7DC1E6C8C7}"/>
               </a:ext>
             </a:extLst>
           </p:cNvPr>
@@ -16686,223 +17243,62 @@
             <a:spLocks noGrp="1"/>
           </p:cNvSpPr>
           <p:nvPr>
-            <p:ph type="sldNum" sz="quarter" idx="12"/>
+            <p:ph type="subTitle" idx="1"/>
           </p:nvPr>
         </p:nvSpPr>
-        <p:spPr/>
+        <p:spPr>
+          <a:xfrm>
+            <a:off x="334963" y="5697630"/>
+            <a:ext cx="5953103" cy="433553"/>
+          </a:xfrm>
+        </p:spPr>
         <p:txBody>
           <a:bodyPr/>
           <a:lstStyle/>
           <a:p>
-            <a:fld id="{94176041-F611-405A-BB9C-F44B4516A572}" type="slidenum">
-              <a:rPr lang="de-DE" smtClean="0"/>
-              <a:pPr/>
-              <a:t>24</a:t>
-            </a:fld>
+            <a:pPr lvl="0">
+              <a:spcBef>
+                <a:spcPts val="300"/>
+              </a:spcBef>
+            </a:pPr>
             <a:endParaRPr lang="de-DE" dirty="0"/>
           </a:p>
         </p:txBody>
       </p:sp>
       <p:sp>
         <p:nvSpPr>
-          <p:cNvPr id="6" name="Textplatzhalter 2">
-            <a:extLst>
-              <a:ext uri="{FF2B5EF4-FFF2-40B4-BE49-F238E27FC236}">
-                <a16:creationId xmlns:a16="http://schemas.microsoft.com/office/drawing/2014/main" id="{827733E1-C0D0-2A6C-CE4E-47A94455C90E}"/>
-              </a:ext>
-            </a:extLst>
-          </p:cNvPr>
-          <p:cNvSpPr txBox="1">
-            <a:spLocks/>
+          <p:cNvPr id="8" name="Text Placeholder 7">
+            <a:extLst>
+              <a:ext uri="{FF2B5EF4-FFF2-40B4-BE49-F238E27FC236}">
+                <a16:creationId xmlns:a16="http://schemas.microsoft.com/office/drawing/2014/main" id="{AC3DDC46-EC81-917D-5132-E75669C07E8C}"/>
+              </a:ext>
+            </a:extLst>
+          </p:cNvPr>
+          <p:cNvSpPr>
+            <a:spLocks noGrp="1"/>
           </p:cNvSpPr>
-          <p:nvPr/>
+          <p:nvPr>
+            <p:ph type="body" sz="quarter" idx="14"/>
+          </p:nvPr>
         </p:nvSpPr>
-        <p:spPr bwMode="gray">
+        <p:spPr>
           <a:xfrm>
-            <a:off x="334963" y="1592263"/>
-            <a:ext cx="5651942" cy="4789490"/>
+            <a:off x="334963" y="6131181"/>
+            <a:ext cx="5953103" cy="36000"/>
           </a:xfrm>
-          <a:prstGeom prst="rect">
-            <a:avLst/>
-          </a:prstGeom>
         </p:spPr>
         <p:txBody>
-          <a:bodyPr vert="horz" lIns="0" tIns="0" rIns="0" bIns="0" rtlCol="0">
-            <a:noAutofit/>
-          </a:bodyPr>
-          <a:lstStyle>
-            <a:lvl1pPr marL="0" indent="0" algn="l" defTabSz="914400" rtl="0" eaLnBrk="1" latinLnBrk="0" hangingPunct="1">
-              <a:spcBef>
-                <a:spcPct val="20000"/>
-              </a:spcBef>
-              <a:buFont typeface="Arial Black" panose="020B0A04020102020204" pitchFamily="34" charset="0"/>
-              <a:buNone/>
-              <a:defRPr sz="1800" b="1" kern="1200">
-                <a:solidFill>
-                  <a:schemeClr val="tx2"/>
-                </a:solidFill>
-                <a:latin typeface="+mn-lt"/>
-                <a:ea typeface="+mn-ea"/>
-                <a:cs typeface="+mn-cs"/>
-              </a:defRPr>
-            </a:lvl1pPr>
-            <a:lvl2pPr marL="162000" indent="-162000" algn="l" defTabSz="914400" rtl="0" eaLnBrk="1" latinLnBrk="0" hangingPunct="1">
-              <a:spcBef>
-                <a:spcPts val="600"/>
-              </a:spcBef>
-              <a:buClr>
-                <a:schemeClr val="accent1"/>
-              </a:buClr>
-              <a:buFont typeface="Wingdings" panose="05000000000000000000" pitchFamily="2" charset="2"/>
-              <a:buChar char="§"/>
-              <a:defRPr sz="1600" kern="1200">
-                <a:solidFill>
-                  <a:schemeClr val="tx2"/>
-                </a:solidFill>
-                <a:latin typeface="+mn-lt"/>
-                <a:ea typeface="+mn-ea"/>
-                <a:cs typeface="+mn-cs"/>
-              </a:defRPr>
-            </a:lvl2pPr>
-            <a:lvl3pPr marL="324000" indent="-162000" algn="l" defTabSz="914400" rtl="0" eaLnBrk="1" latinLnBrk="0" hangingPunct="1">
-              <a:spcBef>
-                <a:spcPts val="600"/>
-              </a:spcBef>
-              <a:buClr>
-                <a:schemeClr val="accent1"/>
-              </a:buClr>
-              <a:buFont typeface="Wingdings" panose="05000000000000000000" pitchFamily="2" charset="2"/>
-              <a:buChar char="§"/>
-              <a:defRPr sz="1400" kern="1200">
-                <a:solidFill>
-                  <a:schemeClr val="tx2"/>
-                </a:solidFill>
-                <a:latin typeface="+mn-lt"/>
-                <a:ea typeface="+mn-ea"/>
-                <a:cs typeface="+mn-cs"/>
-              </a:defRPr>
-            </a:lvl3pPr>
-            <a:lvl4pPr marL="486000" indent="-162000" algn="l" defTabSz="914400" rtl="0" eaLnBrk="1" latinLnBrk="0" hangingPunct="1">
-              <a:spcBef>
-                <a:spcPts val="600"/>
-              </a:spcBef>
-              <a:buClr>
-                <a:schemeClr val="accent1"/>
-              </a:buClr>
-              <a:buFont typeface="Wingdings" panose="05000000000000000000" pitchFamily="2" charset="2"/>
-              <a:buChar char="§"/>
-              <a:defRPr sz="1200" kern="1200">
-                <a:solidFill>
-                  <a:schemeClr val="tx2"/>
-                </a:solidFill>
-                <a:latin typeface="+mn-lt"/>
-                <a:ea typeface="+mn-ea"/>
-                <a:cs typeface="+mn-cs"/>
-              </a:defRPr>
-            </a:lvl4pPr>
-            <a:lvl5pPr marL="648000" indent="-162000" algn="l" defTabSz="914400" rtl="0" eaLnBrk="1" latinLnBrk="0" hangingPunct="1">
-              <a:spcBef>
-                <a:spcPts val="600"/>
-              </a:spcBef>
-              <a:buClr>
-                <a:schemeClr val="accent1"/>
-              </a:buClr>
-              <a:buFont typeface="Wingdings" panose="05000000000000000000" pitchFamily="2" charset="2"/>
-              <a:buChar char="§"/>
-              <a:defRPr lang="de-DE" sz="1200" kern="1200" dirty="0">
-                <a:solidFill>
-                  <a:schemeClr val="tx2"/>
-                </a:solidFill>
-                <a:latin typeface="+mn-lt"/>
-                <a:ea typeface="+mn-ea"/>
-                <a:cs typeface="+mn-cs"/>
-              </a:defRPr>
-            </a:lvl5pPr>
-            <a:lvl6pPr marL="810000" indent="-162000" algn="l" defTabSz="914400" rtl="0" eaLnBrk="1" latinLnBrk="0" hangingPunct="1">
-              <a:spcBef>
-                <a:spcPct val="20000"/>
-              </a:spcBef>
-              <a:buClr>
-                <a:schemeClr val="accent1"/>
-              </a:buClr>
-              <a:buFont typeface="Wingdings" panose="05000000000000000000" pitchFamily="2" charset="2"/>
-              <a:buChar char="§"/>
-              <a:defRPr lang="de-DE" sz="1200" kern="1200" dirty="0">
-                <a:solidFill>
-                  <a:schemeClr val="tx2"/>
-                </a:solidFill>
-                <a:latin typeface="+mn-lt"/>
-                <a:ea typeface="+mn-ea"/>
-                <a:cs typeface="+mn-cs"/>
-              </a:defRPr>
-            </a:lvl6pPr>
-            <a:lvl7pPr marL="972000" indent="-162000" algn="l" defTabSz="914400" rtl="0" eaLnBrk="1" latinLnBrk="0" hangingPunct="1">
-              <a:spcBef>
-                <a:spcPct val="20000"/>
-              </a:spcBef>
-              <a:buClr>
-                <a:schemeClr val="accent1"/>
-              </a:buClr>
-              <a:buFont typeface="Wingdings" panose="05000000000000000000" pitchFamily="2" charset="2"/>
-              <a:buChar char="§"/>
-              <a:defRPr lang="de-DE" sz="1200" kern="1200" dirty="0">
-                <a:solidFill>
-                  <a:schemeClr val="tx2"/>
-                </a:solidFill>
-                <a:latin typeface="+mn-lt"/>
-                <a:ea typeface="+mn-ea"/>
-                <a:cs typeface="+mn-cs"/>
-              </a:defRPr>
-            </a:lvl7pPr>
-            <a:lvl8pPr marL="1134000" indent="-162000" algn="l" defTabSz="914400" rtl="0" eaLnBrk="1" latinLnBrk="0" hangingPunct="1">
-              <a:spcBef>
-                <a:spcPct val="20000"/>
-              </a:spcBef>
-              <a:buClr>
-                <a:schemeClr val="accent1"/>
-              </a:buClr>
-              <a:buFont typeface="Wingdings" panose="05000000000000000000" pitchFamily="2" charset="2"/>
-              <a:buChar char="§"/>
-              <a:defRPr lang="de-DE" sz="1200" kern="1200" dirty="0">
-                <a:solidFill>
-                  <a:schemeClr val="tx2"/>
-                </a:solidFill>
-                <a:latin typeface="+mn-lt"/>
-                <a:ea typeface="+mn-ea"/>
-                <a:cs typeface="+mn-cs"/>
-              </a:defRPr>
-            </a:lvl8pPr>
-            <a:lvl9pPr marL="1296000" indent="-162000" algn="l" defTabSz="914400" rtl="0" eaLnBrk="1" latinLnBrk="0" hangingPunct="1">
-              <a:spcBef>
-                <a:spcPct val="20000"/>
-              </a:spcBef>
-              <a:buClr>
-                <a:schemeClr val="accent1"/>
-              </a:buClr>
-              <a:buFont typeface="Wingdings" panose="05000000000000000000" pitchFamily="2" charset="2"/>
-              <a:buChar char="§"/>
-              <a:defRPr lang="de-DE" sz="1200" kern="1200" dirty="0">
-                <a:solidFill>
-                  <a:schemeClr val="tx2"/>
-                </a:solidFill>
-                <a:latin typeface="+mn-lt"/>
-                <a:ea typeface="+mn-ea"/>
-                <a:cs typeface="+mn-cs"/>
-              </a:defRPr>
-            </a:lvl9pPr>
-          </a:lstStyle>
-          <a:p>
-            <a:r>
-              <a:rPr lang="de-DE" sz="2000" dirty="0"/>
-              <a:t>VIELEN DANK!</a:t>
-            </a:r>
+          <a:bodyPr/>
+          <a:lstStyle/>
+          <a:p>
+            <a:endParaRPr lang="de-DE"/>
           </a:p>
         </p:txBody>
       </p:sp>
     </p:spTree>
     <p:extLst>
       <p:ext uri="{BB962C8B-B14F-4D97-AF65-F5344CB8AC3E}">
-        <p14:creationId xmlns:p14="http://schemas.microsoft.com/office/powerpoint/2010/main" val="786418807"/>
+        <p14:creationId xmlns:p14="http://schemas.microsoft.com/office/powerpoint/2010/main" val="3170976246"/>
       </p:ext>
     </p:extLst>
   </p:cSld>
@@ -22010,42 +22406,6 @@
           <a:chExt cx="0" cy="0"/>
         </a:xfrm>
       </p:grpSpPr>
-      <p:pic>
-        <p:nvPicPr>
-          <p:cNvPr id="14" name="Bildplatzhalter 8">
-            <a:extLst>
-              <a:ext uri="{FF2B5EF4-FFF2-40B4-BE49-F238E27FC236}">
-                <a16:creationId xmlns:a16="http://schemas.microsoft.com/office/drawing/2014/main" id="{E04B746D-380C-49C4-8857-70A37A21278C}"/>
-              </a:ext>
-            </a:extLst>
-          </p:cNvPr>
-          <p:cNvPicPr>
-            <a:picLocks noGrp="1" noChangeAspect="1"/>
-          </p:cNvPicPr>
-          <p:nvPr>
-            <p:ph type="pic" sz="quarter" idx="14"/>
-          </p:nvPr>
-        </p:nvPicPr>
-        <p:blipFill>
-          <a:blip r:embed="rId2" cstate="print">
-            <a:extLst>
-              <a:ext uri="{28A0092B-C50C-407E-A947-70E740481C1C}">
-                <a14:useLocalDpi xmlns:a14="http://schemas.microsoft.com/office/drawing/2010/main"/>
-              </a:ext>
-            </a:extLst>
-          </a:blip>
-          <a:srcRect/>
-          <a:stretch>
-            <a:fillRect/>
-          </a:stretch>
-        </p:blipFill>
-        <p:spPr>
-          <a:xfrm>
-            <a:off x="0" y="765175"/>
-            <a:ext cx="5986463" cy="6092825"/>
-          </a:xfrm>
-        </p:spPr>
-      </p:pic>
       <p:sp>
         <p:nvSpPr>
           <p:cNvPr id="4" name="Titel 3">
@@ -22356,6 +22716,146 @@
               <a:rPr lang="de-DE" sz="2000" dirty="0"/>
               <a:t>Fehleranalyse und Security-Nachvollziehbarkeit nicht möglich</a:t>
             </a:r>
+          </a:p>
+        </p:txBody>
+      </p:sp>
+      <p:pic>
+        <p:nvPicPr>
+          <p:cNvPr id="17" name="Bildplatzhalter 16">
+            <a:extLst>
+              <a:ext uri="{FF2B5EF4-FFF2-40B4-BE49-F238E27FC236}">
+                <a16:creationId xmlns:a16="http://schemas.microsoft.com/office/drawing/2014/main" id="{4A6A492F-31F2-2538-CF9B-FD9D27C1B814}"/>
+              </a:ext>
+            </a:extLst>
+          </p:cNvPr>
+          <p:cNvPicPr>
+            <a:picLocks noGrp="1" noChangeAspect="1"/>
+          </p:cNvPicPr>
+          <p:nvPr>
+            <p:ph type="pic" sz="quarter" idx="14"/>
+          </p:nvPr>
+        </p:nvPicPr>
+        <p:blipFill>
+          <a:blip r:embed="rId2">
+            <a:extLst>
+              <a:ext uri="{28A0092B-C50C-407E-A947-70E740481C1C}">
+                <a14:useLocalDpi xmlns:a14="http://schemas.microsoft.com/office/drawing/2010/main" val="0"/>
+              </a:ext>
+            </a:extLst>
+          </a:blip>
+          <a:srcRect l="2" t="-98256" r="-20" b="-481785"/>
+          <a:stretch>
+            <a:fillRect/>
+          </a:stretch>
+        </p:blipFill>
+        <p:spPr bwMode="gray">
+          <a:xfrm>
+            <a:off x="0" y="765175"/>
+            <a:ext cx="5988050" cy="5599113"/>
+          </a:xfrm>
+          <a:prstGeom prst="rect">
+            <a:avLst/>
+          </a:prstGeom>
+          <a:solidFill>
+            <a:srgbClr val="BBBCBD"/>
+          </a:solidFill>
+        </p:spPr>
+      </p:pic>
+      <p:pic>
+        <p:nvPicPr>
+          <p:cNvPr id="19" name="Grafik 18">
+            <a:extLst>
+              <a:ext uri="{FF2B5EF4-FFF2-40B4-BE49-F238E27FC236}">
+                <a16:creationId xmlns:a16="http://schemas.microsoft.com/office/drawing/2014/main" id="{DC8174C7-E83B-5EE4-AD6A-1DF80B45E09B}"/>
+              </a:ext>
+            </a:extLst>
+          </p:cNvPr>
+          <p:cNvPicPr>
+            <a:picLocks noChangeAspect="1"/>
+          </p:cNvPicPr>
+          <p:nvPr/>
+        </p:nvPicPr>
+        <p:blipFill>
+          <a:blip r:embed="rId3"/>
+          <a:stretch>
+            <a:fillRect/>
+          </a:stretch>
+        </p:blipFill>
+        <p:spPr>
+          <a:xfrm>
+            <a:off x="0" y="2370795"/>
+            <a:ext cx="6021219" cy="3992880"/>
+          </a:xfrm>
+          <a:prstGeom prst="rect">
+            <a:avLst/>
+          </a:prstGeom>
+        </p:spPr>
+      </p:pic>
+      <p:pic>
+        <p:nvPicPr>
+          <p:cNvPr id="21" name="Grafik 20">
+            <a:extLst>
+              <a:ext uri="{FF2B5EF4-FFF2-40B4-BE49-F238E27FC236}">
+                <a16:creationId xmlns:a16="http://schemas.microsoft.com/office/drawing/2014/main" id="{65395A44-41D9-F602-1ADF-18308D99B895}"/>
+              </a:ext>
+            </a:extLst>
+          </p:cNvPr>
+          <p:cNvPicPr>
+            <a:picLocks noChangeAspect="1"/>
+          </p:cNvPicPr>
+          <p:nvPr/>
+        </p:nvPicPr>
+        <p:blipFill>
+          <a:blip r:embed="rId4"/>
+          <a:stretch>
+            <a:fillRect/>
+          </a:stretch>
+        </p:blipFill>
+        <p:spPr>
+          <a:xfrm>
+            <a:off x="1" y="689804"/>
+            <a:ext cx="6096000" cy="940875"/>
+          </a:xfrm>
+          <a:prstGeom prst="rect">
+            <a:avLst/>
+          </a:prstGeom>
+        </p:spPr>
+      </p:pic>
+      <p:sp>
+        <p:nvSpPr>
+          <p:cNvPr id="22" name="Textfeld 21">
+            <a:extLst>
+              <a:ext uri="{FF2B5EF4-FFF2-40B4-BE49-F238E27FC236}">
+                <a16:creationId xmlns:a16="http://schemas.microsoft.com/office/drawing/2014/main" id="{5FDB3741-4B37-E9C5-3BCD-688F2509F265}"/>
+              </a:ext>
+            </a:extLst>
+          </p:cNvPr>
+          <p:cNvSpPr txBox="1"/>
+          <p:nvPr/>
+        </p:nvSpPr>
+        <p:spPr bwMode="gray">
+          <a:xfrm>
+            <a:off x="6507480" y="3886200"/>
+            <a:ext cx="0" cy="0"/>
+          </a:xfrm>
+          <a:prstGeom prst="rect">
+            <a:avLst/>
+          </a:prstGeom>
+          <a:noFill/>
+        </p:spPr>
+        <p:txBody>
+          <a:bodyPr wrap="none" lIns="0" tIns="0" rIns="0" bIns="0" rtlCol="0">
+            <a:noAutofit/>
+          </a:bodyPr>
+          <a:lstStyle/>
+          <a:p>
+            <a:endParaRPr lang="de-DE" dirty="0" err="1">
+              <a:solidFill>
+                <a:schemeClr val="tx2">
+                  <a:lumMod val="75000"/>
+                </a:schemeClr>
+              </a:solidFill>
+            </a:endParaRPr>
           </a:p>
         </p:txBody>
       </p:sp>
@@ -22407,42 +22907,6 @@
           <a:chExt cx="0" cy="0"/>
         </a:xfrm>
       </p:grpSpPr>
-      <p:pic>
-        <p:nvPicPr>
-          <p:cNvPr id="14" name="Bildplatzhalter 8">
-            <a:extLst>
-              <a:ext uri="{FF2B5EF4-FFF2-40B4-BE49-F238E27FC236}">
-                <a16:creationId xmlns:a16="http://schemas.microsoft.com/office/drawing/2014/main" id="{72C47EC2-2409-F37D-B2F3-F774DEBD196B}"/>
-              </a:ext>
-            </a:extLst>
-          </p:cNvPr>
-          <p:cNvPicPr>
-            <a:picLocks noGrp="1" noChangeAspect="1"/>
-          </p:cNvPicPr>
-          <p:nvPr>
-            <p:ph type="pic" sz="quarter" idx="14"/>
-          </p:nvPr>
-        </p:nvPicPr>
-        <p:blipFill>
-          <a:blip r:embed="rId2" cstate="print">
-            <a:extLst>
-              <a:ext uri="{28A0092B-C50C-407E-A947-70E740481C1C}">
-                <a14:useLocalDpi xmlns:a14="http://schemas.microsoft.com/office/drawing/2010/main"/>
-              </a:ext>
-            </a:extLst>
-          </a:blip>
-          <a:srcRect/>
-          <a:stretch>
-            <a:fillRect/>
-          </a:stretch>
-        </p:blipFill>
-        <p:spPr>
-          <a:xfrm>
-            <a:off x="0" y="765175"/>
-            <a:ext cx="5986463" cy="6092825"/>
-          </a:xfrm>
-        </p:spPr>
-      </p:pic>
       <p:sp>
         <p:nvSpPr>
           <p:cNvPr id="4" name="Titel 3">
@@ -22763,6 +23227,138 @@
           </a:p>
         </p:txBody>
       </p:sp>
+      <p:pic>
+        <p:nvPicPr>
+          <p:cNvPr id="9" name="Bildplatzhalter 8">
+            <a:extLst>
+              <a:ext uri="{FF2B5EF4-FFF2-40B4-BE49-F238E27FC236}">
+                <a16:creationId xmlns:a16="http://schemas.microsoft.com/office/drawing/2014/main" id="{BFF4BFA2-54E5-4677-18E2-D97FA73F21C7}"/>
+              </a:ext>
+            </a:extLst>
+          </p:cNvPr>
+          <p:cNvPicPr>
+            <a:picLocks noGrp="1" noChangeAspect="1"/>
+          </p:cNvPicPr>
+          <p:nvPr>
+            <p:ph type="pic" sz="quarter" idx="14"/>
+          </p:nvPr>
+        </p:nvPicPr>
+        <p:blipFill>
+          <a:blip r:embed="rId2">
+            <a:extLst>
+              <a:ext uri="{28A0092B-C50C-407E-A947-70E740481C1C}">
+                <a14:useLocalDpi xmlns:a14="http://schemas.microsoft.com/office/drawing/2010/main" val="0"/>
+              </a:ext>
+            </a:extLst>
+          </a:blip>
+          <a:srcRect l="2" t="-21044" r="-21" b="-60873"/>
+          <a:stretch>
+            <a:fillRect/>
+          </a:stretch>
+        </p:blipFill>
+        <p:spPr bwMode="gray">
+          <a:xfrm>
+            <a:off x="0" y="765175"/>
+            <a:ext cx="5988050" cy="5599113"/>
+          </a:xfrm>
+          <a:prstGeom prst="rect">
+            <a:avLst/>
+          </a:prstGeom>
+          <a:solidFill>
+            <a:srgbClr val="BBBCBD"/>
+          </a:solidFill>
+        </p:spPr>
+      </p:pic>
+      <p:pic>
+        <p:nvPicPr>
+          <p:cNvPr id="11" name="Grafik 10">
+            <a:extLst>
+              <a:ext uri="{FF2B5EF4-FFF2-40B4-BE49-F238E27FC236}">
+                <a16:creationId xmlns:a16="http://schemas.microsoft.com/office/drawing/2014/main" id="{F001F234-FACB-D66E-799C-0542AF9B0BF9}"/>
+              </a:ext>
+            </a:extLst>
+          </p:cNvPr>
+          <p:cNvPicPr>
+            <a:picLocks noChangeAspect="1"/>
+          </p:cNvPicPr>
+          <p:nvPr/>
+        </p:nvPicPr>
+        <p:blipFill>
+          <a:blip r:embed="rId3"/>
+          <a:stretch>
+            <a:fillRect/>
+          </a:stretch>
+        </p:blipFill>
+        <p:spPr>
+          <a:xfrm>
+            <a:off x="0" y="659325"/>
+            <a:ext cx="6096000" cy="818955"/>
+          </a:xfrm>
+          <a:prstGeom prst="rect">
+            <a:avLst/>
+          </a:prstGeom>
+        </p:spPr>
+      </p:pic>
+      <p:pic>
+        <p:nvPicPr>
+          <p:cNvPr id="13" name="Grafik 12">
+            <a:extLst>
+              <a:ext uri="{FF2B5EF4-FFF2-40B4-BE49-F238E27FC236}">
+                <a16:creationId xmlns:a16="http://schemas.microsoft.com/office/drawing/2014/main" id="{463D6E43-9F04-02BE-B832-7441A6EEE64C}"/>
+              </a:ext>
+            </a:extLst>
+          </p:cNvPr>
+          <p:cNvPicPr>
+            <a:picLocks noChangeAspect="1"/>
+          </p:cNvPicPr>
+          <p:nvPr/>
+        </p:nvPicPr>
+        <p:blipFill>
+          <a:blip r:embed="rId4"/>
+          <a:stretch>
+            <a:fillRect/>
+          </a:stretch>
+        </p:blipFill>
+        <p:spPr>
+          <a:xfrm>
+            <a:off x="0" y="4446203"/>
+            <a:ext cx="6096000" cy="2023935"/>
+          </a:xfrm>
+          <a:prstGeom prst="rect">
+            <a:avLst/>
+          </a:prstGeom>
+        </p:spPr>
+      </p:pic>
+      <p:pic>
+        <p:nvPicPr>
+          <p:cNvPr id="16" name="Grafik 15">
+            <a:extLst>
+              <a:ext uri="{FF2B5EF4-FFF2-40B4-BE49-F238E27FC236}">
+                <a16:creationId xmlns:a16="http://schemas.microsoft.com/office/drawing/2014/main" id="{6AD6D689-4C49-EBD3-365F-56B693256E41}"/>
+              </a:ext>
+            </a:extLst>
+          </p:cNvPr>
+          <p:cNvPicPr>
+            <a:picLocks noChangeAspect="1"/>
+          </p:cNvPicPr>
+          <p:nvPr/>
+        </p:nvPicPr>
+        <p:blipFill>
+          <a:blip r:embed="rId5"/>
+          <a:stretch>
+            <a:fillRect/>
+          </a:stretch>
+        </p:blipFill>
+        <p:spPr>
+          <a:xfrm>
+            <a:off x="5948806" y="1412875"/>
+            <a:ext cx="76207" cy="3164840"/>
+          </a:xfrm>
+          <a:prstGeom prst="rect">
+            <a:avLst/>
+          </a:prstGeom>
+        </p:spPr>
+      </p:pic>
     </p:spTree>
     <p:extLst>
       <p:ext uri="{BB962C8B-B14F-4D97-AF65-F5344CB8AC3E}">
